--- a/site/tema6/diapositivas/estados.pptx
+++ b/site/tema6/diapositivas/estados.pptx
@@ -4,6 +4,9 @@
   <p:sldMasterIdLst>
     <p:sldMasterId id="2147483648" r:id="rId1"/>
   </p:sldMasterIdLst>
+  <p:notesMasterIdLst>
+    <p:notesMasterId r:id="rId10"/>
+  </p:notesMasterIdLst>
   <p:sldIdLst>
     <p:sldId id="256" r:id="rId2"/>
     <p:sldId id="257" r:id="rId3"/>
@@ -14,9 +17,6 @@
     <p:sldId id="262" r:id="rId8"/>
     <p:sldId id="263" r:id="rId9"/>
   </p:sldIdLst>
-  <p:notesMasterIdLst>
-    <p:notesMasterId r:id="rId10"/>
-  </p:notesMasterIdLst>
   <p:sldSz cx="12192000" cy="6858000"/>
   <p:notesSz cx="6858000" cy="12192000"/>
   <p:defaultTextStyle>
@@ -111,6 +111,11 @@
       </a:defRPr>
     </a:lvl9pPr>
   </p:defaultTextStyle>
+  <p:extLst>
+    <p:ext uri="{EFAFB233-063F-42B5-8137-9DF3F51BA10A}">
+      <p15:sldGuideLst xmlns:p15="http://schemas.microsoft.com/office/powerpoint/2012/main"/>
+    </p:ext>
+  </p:extLst>
 </p:presentation>
 </file>
 
@@ -136,234 +141,10 @@
           <a:chExt cx="0" cy="0"/>
         </a:xfrm>
       </p:grpSpPr>
-      <p:sp>
-        <p:nvSpPr>
-          <p:cNvPr id="2" name="Header Placeholder 1"/>
-          <p:cNvSpPr>
-            <a:spLocks noGrp="1"/>
-          </p:cNvSpPr>
-          <p:nvPr>
-            <p:ph type="hdr" sz="quarter"/>
-          </p:nvPr>
-        </p:nvSpPr>
-        <p:spPr>
-          <a:xfrm>
-            <a:off x="0" y="0"/>
-            <a:ext cx="2971800" cy="458788"/>
-          </a:xfrm>
-          <a:prstGeom prst="rect">
-            <a:avLst/>
-          </a:prstGeom>
-        </p:spPr>
-        <p:txBody>
-          <a:bodyPr vert="horz" lIns="91440" tIns="45720" rIns="91440" bIns="45720" rtlCol="0"/>
-          <a:lstStyle>
-            <a:lvl1pPr algn="l">
-              <a:defRPr sz="1200"/>
-            </a:lvl1pPr>
-          </a:lstStyle>
-          <a:p>
-            <a:endParaRPr lang="en-US"/>
-          </a:p>
-        </p:txBody>
-      </p:sp>
-      <p:sp>
-        <p:nvSpPr>
-          <p:cNvPr id="3" name="Date Placeholder 2"/>
-          <p:cNvSpPr>
-            <a:spLocks noGrp="1"/>
-          </p:cNvSpPr>
-          <p:nvPr>
-            <p:ph type="dt" idx="1"/>
-          </p:nvPr>
-        </p:nvSpPr>
-        <p:spPr>
-          <a:xfrm>
-            <a:off x="3884613" y="0"/>
-            <a:ext cx="2971800" cy="458788"/>
-          </a:xfrm>
-          <a:prstGeom prst="rect">
-            <a:avLst/>
-          </a:prstGeom>
-        </p:spPr>
-        <p:txBody>
-          <a:bodyPr vert="horz" lIns="91440" tIns="45720" rIns="91440" bIns="45720" rtlCol="0"/>
-          <a:lstStyle>
-            <a:lvl1pPr algn="r">
-              <a:defRPr sz="1200"/>
-            </a:lvl1pPr>
-          </a:lstStyle>
-          <a:p>
-            <a:fld id="{5282F153-3F37-0F45-9E97-73ACFA13230C}" type="datetimeFigureOut">
-              <a:rPr lang="en-US"/>
-              <a:t>7/23/19</a:t>
-            </a:fld>
-            <a:endParaRPr lang="en-US"/>
-          </a:p>
-        </p:txBody>
-      </p:sp>
-      <p:sp>
-        <p:nvSpPr>
-          <p:cNvPr id="4" name="Slide Image Placeholder 3"/>
-          <p:cNvSpPr>
-            <a:spLocks noGrp="1" noRot="1" noChangeAspect="1"/>
-          </p:cNvSpPr>
-          <p:nvPr>
-            <p:ph type="sldImg" idx="2"/>
-          </p:nvPr>
-        </p:nvSpPr>
-        <p:spPr>
-          <a:xfrm>
-            <a:off x="685800" y="1143000"/>
-            <a:ext cx="5486400" cy="3086100"/>
-          </a:xfrm>
-          <a:prstGeom prst="rect">
-            <a:avLst/>
-          </a:prstGeom>
-          <a:noFill/>
-          <a:ln w="12700">
-            <a:solidFill>
-              <a:prstClr val="black"/>
-            </a:solidFill>
-          </a:ln>
-        </p:spPr>
-        <p:txBody>
-          <a:bodyPr vert="horz" lIns="91440" tIns="45720" rIns="91440" bIns="45720" rtlCol="0" anchor="ctr"/>
-          <a:lstStyle/>
-          <a:p>
-            <a:endParaRPr lang="en-US"/>
-          </a:p>
-        </p:txBody>
-      </p:sp>
-      <p:sp>
-        <p:nvSpPr>
-          <p:cNvPr id="5" name="Notes Placeholder 4"/>
-          <p:cNvSpPr>
-            <a:spLocks noGrp="1"/>
-          </p:cNvSpPr>
-          <p:nvPr>
-            <p:ph type="body" sz="quarter" idx="3"/>
-          </p:nvPr>
-        </p:nvSpPr>
-        <p:spPr>
-          <a:xfrm>
-            <a:off x="685800" y="4400550"/>
-            <a:ext cx="5486400" cy="3600450"/>
-          </a:xfrm>
-          <a:prstGeom prst="rect">
-            <a:avLst/>
-          </a:prstGeom>
-        </p:spPr>
-        <p:txBody>
-          <a:bodyPr vert="horz" lIns="91440" tIns="45720" rIns="91440" bIns="45720" rtlCol="0"/>
-          <a:lstStyle/>
-          <a:p>
-            <a:pPr lvl="0"/>
-            <a:r>
-              <a:rPr lang="en-US"/>
-              <a:t>Click to edit Master text styles</a:t>
-            </a:r>
-          </a:p>
-          <a:p>
-            <a:pPr lvl="1"/>
-            <a:r>
-              <a:rPr lang="en-US"/>
-              <a:t>Second level</a:t>
-            </a:r>
-          </a:p>
-          <a:p>
-            <a:pPr lvl="2"/>
-            <a:r>
-              <a:rPr lang="en-US"/>
-              <a:t>Third level</a:t>
-            </a:r>
-          </a:p>
-          <a:p>
-            <a:pPr lvl="3"/>
-            <a:r>
-              <a:rPr lang="en-US"/>
-              <a:t>Fourth level</a:t>
-            </a:r>
-          </a:p>
-          <a:p>
-            <a:pPr lvl="4"/>
-            <a:r>
-              <a:rPr lang="en-US"/>
-              <a:t>Fifth level</a:t>
-            </a:r>
-          </a:p>
-        </p:txBody>
-      </p:sp>
-      <p:sp>
-        <p:nvSpPr>
-          <p:cNvPr id="6" name="Footer Placeholder 5"/>
-          <p:cNvSpPr>
-            <a:spLocks noGrp="1"/>
-          </p:cNvSpPr>
-          <p:nvPr>
-            <p:ph type="ftr" sz="quarter" idx="4"/>
-          </p:nvPr>
-        </p:nvSpPr>
-        <p:spPr>
-          <a:xfrm>
-            <a:off x="0" y="8685213"/>
-            <a:ext cx="2971800" cy="458787"/>
-          </a:xfrm>
-          <a:prstGeom prst="rect">
-            <a:avLst/>
-          </a:prstGeom>
-        </p:spPr>
-        <p:txBody>
-          <a:bodyPr vert="horz" lIns="91440" tIns="45720" rIns="91440" bIns="45720" rtlCol="0" anchor="b"/>
-          <a:lstStyle>
-            <a:lvl1pPr algn="l">
-              <a:defRPr sz="1200"/>
-            </a:lvl1pPr>
-          </a:lstStyle>
-          <a:p>
-            <a:endParaRPr lang="en-US"/>
-          </a:p>
-        </p:txBody>
-      </p:sp>
-      <p:sp>
-        <p:nvSpPr>
-          <p:cNvPr id="7" name="Slide Number Placeholder 6"/>
-          <p:cNvSpPr>
-            <a:spLocks noGrp="1"/>
-          </p:cNvSpPr>
-          <p:nvPr>
-            <p:ph type="sldNum" sz="quarter" idx="5"/>
-          </p:nvPr>
-        </p:nvSpPr>
-        <p:spPr>
-          <a:xfrm>
-            <a:off x="3884613" y="8685213"/>
-            <a:ext cx="2971800" cy="458787"/>
-          </a:xfrm>
-          <a:prstGeom prst="rect">
-            <a:avLst/>
-          </a:prstGeom>
-        </p:spPr>
-        <p:txBody>
-          <a:bodyPr vert="horz" lIns="91440" tIns="45720" rIns="91440" bIns="45720" rtlCol="0" anchor="b"/>
-          <a:lstStyle>
-            <a:lvl1pPr algn="r">
-              <a:defRPr sz="1200"/>
-            </a:lvl1pPr>
-          </a:lstStyle>
-          <a:p>
-            <a:fld id="{CE5E9CC1-C706-0F49-92D6-E571CC5EEA8F}" type="slidenum">
-              <a:rPr lang="en-US"/>
-              <a:t>‹#›</a:t>
-            </a:fld>
-            <a:endParaRPr lang="en-US"/>
-          </a:p>
-        </p:txBody>
-      </p:sp>
     </p:spTree>
     <p:extLst>
       <p:ext uri="{BB962C8B-B14F-4D97-AF65-F5344CB8AC3E}">
-        <p14:creationId xmlns:p14="http://schemas.microsoft.com/office/powerpoint/2010/main" val="1024086991"/>
+        <p14:creationId xmlns:p14="http://schemas.microsoft.com/office/powerpoint/2010/main" val="115794573"/>
       </p:ext>
     </p:extLst>
   </p:cSld>
@@ -507,10 +288,6 @@
           <a:bodyPr/>
           <a:lstStyle/>
           <a:p>
-            <a:r>
-              <a:rPr lang="en-US" dirty="0"/>
-              <a:t/>
-            </a:r>
             <a:endParaRPr lang="en-US" dirty="0"/>
           </a:p>
         </p:txBody>
@@ -595,10 +372,6 @@
           <a:bodyPr/>
           <a:lstStyle/>
           <a:p>
-            <a:r>
-              <a:rPr lang="en-US" dirty="0"/>
-              <a:t/>
-            </a:r>
             <a:endParaRPr lang="en-US" dirty="0"/>
           </a:p>
         </p:txBody>
@@ -683,10 +456,6 @@
           <a:bodyPr/>
           <a:lstStyle/>
           <a:p>
-            <a:r>
-              <a:rPr lang="en-US" dirty="0"/>
-              <a:t/>
-            </a:r>
             <a:endParaRPr lang="en-US" dirty="0"/>
           </a:p>
         </p:txBody>
@@ -771,10 +540,6 @@
           <a:bodyPr/>
           <a:lstStyle/>
           <a:p>
-            <a:r>
-              <a:rPr lang="en-US" dirty="0"/>
-              <a:t/>
-            </a:r>
             <a:endParaRPr lang="en-US" dirty="0"/>
           </a:p>
         </p:txBody>
@@ -859,10 +624,6 @@
           <a:bodyPr/>
           <a:lstStyle/>
           <a:p>
-            <a:r>
-              <a:rPr lang="en-US" dirty="0"/>
-              <a:t/>
-            </a:r>
             <a:endParaRPr lang="en-US" dirty="0"/>
           </a:p>
         </p:txBody>
@@ -947,10 +708,6 @@
           <a:bodyPr/>
           <a:lstStyle/>
           <a:p>
-            <a:r>
-              <a:rPr lang="en-US" dirty="0"/>
-              <a:t/>
-            </a:r>
             <a:endParaRPr lang="en-US" dirty="0"/>
           </a:p>
         </p:txBody>
@@ -1035,10 +792,6 @@
           <a:bodyPr/>
           <a:lstStyle/>
           <a:p>
-            <a:r>
-              <a:rPr lang="en-US" dirty="0"/>
-              <a:t/>
-            </a:r>
             <a:endParaRPr lang="en-US" dirty="0"/>
           </a:p>
         </p:txBody>
@@ -1123,10 +876,6 @@
           <a:bodyPr/>
           <a:lstStyle/>
           <a:p>
-            <a:r>
-              <a:rPr lang="en-US" dirty="0"/>
-              <a:t/>
-            </a:r>
             <a:endParaRPr lang="en-US" dirty="0"/>
           </a:p>
         </p:txBody>
@@ -1200,6 +949,11 @@
 <file path=ppt/slideMasters/slideMaster1.xml><?xml version="1.0" encoding="utf-8"?>
 <p:sldMaster xmlns:a="http://schemas.openxmlformats.org/drawingml/2006/main" xmlns:r="http://schemas.openxmlformats.org/officeDocument/2006/relationships" xmlns:p="http://schemas.openxmlformats.org/presentationml/2006/main">
   <p:cSld>
+    <p:bg>
+      <p:bgRef idx="1001">
+        <a:schemeClr val="bg1"/>
+      </p:bgRef>
+    </p:bg>
     <p:spTree>
       <p:nvGrpSpPr>
         <p:cNvPr id="1" name=""/>
@@ -1482,6 +1236,7 @@
         <a:solidFill>
           <a:srgbClr val="303F9F"/>
         </a:solidFill>
+        <a:effectLst/>
       </p:bgPr>
     </p:bg>
     <p:spTree>
@@ -1519,7 +1274,7 @@
           <a:bodyPr wrap="square" rtlCol="0" anchor="ctr"/>
           <a:lstStyle/>
           <a:p>
-            <a:pPr indent="0" marL="0">
+            <a:pPr marL="0" indent="0">
               <a:buNone/>
             </a:pPr>
             <a:r>
@@ -1558,7 +1313,7 @@
           <a:bodyPr wrap="square" rtlCol="0" anchor="ctr"/>
           <a:lstStyle/>
           <a:p>
-            <a:pPr algn="l" indent="0" marL="0">
+            <a:pPr marL="0" indent="0" algn="l">
               <a:buNone/>
             </a:pPr>
             <a:r>
@@ -1600,6 +1355,13 @@
             <a:prstDash val="solid"/>
           </a:ln>
         </p:spPr>
+        <p:txBody>
+          <a:bodyPr/>
+          <a:lstStyle/>
+          <a:p>
+            <a:endParaRPr lang="es-ES"/>
+          </a:p>
+        </p:txBody>
       </p:sp>
       <p:sp>
         <p:nvSpPr>
@@ -1622,7 +1384,7 @@
           <a:bodyPr wrap="square" rtlCol="0" anchor="ctr"/>
           <a:lstStyle/>
           <a:p>
-            <a:pPr indent="0" marL="0">
+            <a:pPr marL="0" indent="0">
               <a:buNone/>
             </a:pPr>
             <a:r>
@@ -1689,6 +1451,13 @@
             <a:prstDash val="solid"/>
           </a:ln>
         </p:spPr>
+        <p:txBody>
+          <a:bodyPr/>
+          <a:lstStyle/>
+          <a:p>
+            <a:endParaRPr lang="es-ES"/>
+          </a:p>
+        </p:txBody>
       </p:sp>
       <p:sp>
         <p:nvSpPr>
@@ -1711,7 +1480,7 @@
           <a:bodyPr wrap="square" rtlCol="0" anchor="ctr"/>
           <a:lstStyle/>
           <a:p>
-            <a:pPr indent="0" marL="0">
+            <a:pPr marL="0" indent="0">
               <a:buNone/>
             </a:pPr>
             <a:r>
@@ -1750,7 +1519,7 @@
           <a:bodyPr wrap="square" rtlCol="0" anchor="t"/>
           <a:lstStyle/>
           <a:p>
-            <a:pPr indent="0" marL="0">
+            <a:pPr marL="0" indent="0">
               <a:spcAft>
                 <a:spcPts val="800"/>
               </a:spcAft>
@@ -1770,7 +1539,7 @@
             <a:endParaRPr lang="en-US" sz="1700" dirty="0"/>
           </a:p>
           <a:p>
-            <a:pPr indent="0" marL="0">
+            <a:pPr marL="0" indent="0">
               <a:spcAft>
                 <a:spcPts val="800"/>
               </a:spcAft>
@@ -1815,6 +1584,13 @@
             <a:prstDash val="solid"/>
           </a:ln>
         </p:spPr>
+        <p:txBody>
+          <a:bodyPr/>
+          <a:lstStyle/>
+          <a:p>
+            <a:endParaRPr lang="es-ES"/>
+          </a:p>
+        </p:txBody>
       </p:sp>
       <p:sp>
         <p:nvSpPr>
@@ -1837,7 +1613,7 @@
           <a:bodyPr wrap="square" rtlCol="0" anchor="ctr"/>
           <a:lstStyle/>
           <a:p>
-            <a:pPr indent="0" marL="0">
+            <a:pPr marL="0" indent="0">
               <a:buNone/>
             </a:pPr>
             <a:r>
@@ -1876,7 +1652,7 @@
           <a:bodyPr wrap="square" rtlCol="0" anchor="ctr"/>
           <a:lstStyle/>
           <a:p>
-            <a:pPr algn="r" indent="0" marL="0">
+            <a:pPr marL="0" indent="0" algn="r">
               <a:buNone/>
             </a:pPr>
             <a:r>
@@ -1943,6 +1719,13 @@
             <a:prstDash val="solid"/>
           </a:ln>
         </p:spPr>
+        <p:txBody>
+          <a:bodyPr/>
+          <a:lstStyle/>
+          <a:p>
+            <a:endParaRPr lang="es-ES"/>
+          </a:p>
+        </p:txBody>
       </p:sp>
       <p:sp>
         <p:nvSpPr>
@@ -1965,7 +1748,7 @@
           <a:bodyPr wrap="square" rtlCol="0" anchor="ctr"/>
           <a:lstStyle/>
           <a:p>
-            <a:pPr indent="0" marL="0">
+            <a:pPr marL="0" indent="0">
               <a:buNone/>
             </a:pPr>
             <a:r>
@@ -2007,6 +1790,13 @@
             <a:prstDash val="solid"/>
           </a:ln>
         </p:spPr>
+        <p:txBody>
+          <a:bodyPr/>
+          <a:lstStyle/>
+          <a:p>
+            <a:endParaRPr lang="es-ES"/>
+          </a:p>
+        </p:txBody>
       </p:sp>
       <p:sp>
         <p:nvSpPr>
@@ -2029,7 +1819,7 @@
           <a:bodyPr wrap="square" rtlCol="0" anchor="t"/>
           <a:lstStyle/>
           <a:p>
-            <a:pPr indent="0" marL="0">
+            <a:pPr marL="0" indent="0">
               <a:spcAft>
                 <a:spcPts val="800"/>
               </a:spcAft>
@@ -2074,6 +1864,13 @@
             <a:prstDash val="solid"/>
           </a:ln>
         </p:spPr>
+        <p:txBody>
+          <a:bodyPr/>
+          <a:lstStyle/>
+          <a:p>
+            <a:endParaRPr lang="es-ES"/>
+          </a:p>
+        </p:txBody>
       </p:sp>
       <p:sp>
         <p:nvSpPr>
@@ -2096,7 +1893,7 @@
           <a:bodyPr wrap="square" rtlCol="0" anchor="ctr"/>
           <a:lstStyle/>
           <a:p>
-            <a:pPr algn="ctr" indent="0" marL="0">
+            <a:pPr marL="0" indent="0" algn="ctr">
               <a:buNone/>
             </a:pPr>
             <a:r>
@@ -2135,7 +1932,7 @@
           <a:bodyPr wrap="square" rtlCol="0" anchor="t"/>
           <a:lstStyle/>
           <a:p>
-            <a:pPr indent="0" marL="0">
+            <a:pPr marL="0" indent="0">
               <a:spcAft>
                 <a:spcPts val="800"/>
               </a:spcAft>
@@ -2155,7 +1952,7 @@
             <a:endParaRPr lang="en-US" sz="1500" dirty="0"/>
           </a:p>
           <a:p>
-            <a:pPr indent="0" marL="0">
+            <a:pPr marL="0" indent="0">
               <a:spcAft>
                 <a:spcPts val="800"/>
               </a:spcAft>
@@ -2199,6 +1996,13 @@
             <a:tailEnd type="triangle"/>
           </a:ln>
         </p:spPr>
+        <p:txBody>
+          <a:bodyPr/>
+          <a:lstStyle/>
+          <a:p>
+            <a:endParaRPr lang="es-ES"/>
+          </a:p>
+        </p:txBody>
       </p:sp>
       <p:sp>
         <p:nvSpPr>
@@ -2221,7 +2025,7 @@
           <a:bodyPr wrap="square" rtlCol="0" anchor="ctr"/>
           <a:lstStyle/>
           <a:p>
-            <a:pPr algn="ctr" indent="0" marL="0">
+            <a:pPr marL="0" indent="0" algn="ctr">
               <a:buNone/>
             </a:pPr>
             <a:r>
@@ -2260,7 +2064,7 @@
           <a:bodyPr wrap="square" rtlCol="0" anchor="t"/>
           <a:lstStyle/>
           <a:p>
-            <a:pPr indent="0" marL="0">
+            <a:pPr marL="0" indent="0">
               <a:spcAft>
                 <a:spcPts val="800"/>
               </a:spcAft>
@@ -2305,6 +2109,13 @@
             <a:prstDash val="solid"/>
           </a:ln>
         </p:spPr>
+        <p:txBody>
+          <a:bodyPr/>
+          <a:lstStyle/>
+          <a:p>
+            <a:endParaRPr lang="es-ES"/>
+          </a:p>
+        </p:txBody>
       </p:sp>
       <p:sp>
         <p:nvSpPr>
@@ -2330,6 +2141,13 @@
             <a:prstDash val="solid"/>
           </a:ln>
         </p:spPr>
+        <p:txBody>
+          <a:bodyPr/>
+          <a:lstStyle/>
+          <a:p>
+            <a:endParaRPr lang="es-ES"/>
+          </a:p>
+        </p:txBody>
       </p:sp>
       <p:sp>
         <p:nvSpPr>
@@ -2352,7 +2170,7 @@
           <a:bodyPr wrap="square" rtlCol="0" anchor="t"/>
           <a:lstStyle/>
           <a:p>
-            <a:pPr indent="0" marL="0">
+            <a:pPr marL="0" indent="0">
               <a:spcAft>
                 <a:spcPts val="800"/>
               </a:spcAft>
@@ -2394,7 +2212,7 @@
           <a:bodyPr wrap="square" rtlCol="0" anchor="ctr"/>
           <a:lstStyle/>
           <a:p>
-            <a:pPr algn="r" indent="0" marL="0">
+            <a:pPr marL="0" indent="0" algn="r">
               <a:buNone/>
             </a:pPr>
             <a:r>
@@ -2461,6 +2279,13 @@
             <a:prstDash val="solid"/>
           </a:ln>
         </p:spPr>
+        <p:txBody>
+          <a:bodyPr/>
+          <a:lstStyle/>
+          <a:p>
+            <a:endParaRPr lang="es-ES"/>
+          </a:p>
+        </p:txBody>
       </p:sp>
       <p:sp>
         <p:nvSpPr>
@@ -2483,7 +2308,7 @@
           <a:bodyPr wrap="square" rtlCol="0" anchor="ctr"/>
           <a:lstStyle/>
           <a:p>
-            <a:pPr indent="0" marL="0">
+            <a:pPr marL="0" indent="0">
               <a:buNone/>
             </a:pPr>
             <a:r>
@@ -2509,7 +2334,7 @@
         </p:nvSpPr>
         <p:spPr>
           <a:xfrm>
-            <a:off x="1371600" y="1828800"/>
+            <a:off x="1371600" y="1188720"/>
             <a:ext cx="1828800" cy="640080"/>
           </a:xfrm>
           <a:prstGeom prst="roundRect">
@@ -2525,6 +2350,13 @@
             <a:prstDash val="solid"/>
           </a:ln>
         </p:spPr>
+        <p:txBody>
+          <a:bodyPr/>
+          <a:lstStyle/>
+          <a:p>
+            <a:endParaRPr lang="es-ES"/>
+          </a:p>
+        </p:txBody>
       </p:sp>
       <p:sp>
         <p:nvSpPr>
@@ -2534,7 +2366,7 @@
         </p:nvSpPr>
         <p:spPr>
           <a:xfrm>
-            <a:off x="1371600" y="1828800"/>
+            <a:off x="1371600" y="1188720"/>
             <a:ext cx="1828800" cy="640080"/>
           </a:xfrm>
           <a:prstGeom prst="rect">
@@ -2547,7 +2379,7 @@
           <a:bodyPr wrap="square" rtlCol="0" anchor="ctr"/>
           <a:lstStyle/>
           <a:p>
-            <a:pPr algn="ctr" indent="0" marL="0">
+            <a:pPr marL="0" indent="0" algn="ctr">
               <a:buNone/>
             </a:pPr>
             <a:r>
@@ -2573,7 +2405,7 @@
         </p:nvSpPr>
         <p:spPr>
           <a:xfrm>
-            <a:off x="8961120" y="1828800"/>
+            <a:off x="8961120" y="1188720"/>
             <a:ext cx="1828800" cy="640080"/>
           </a:xfrm>
           <a:prstGeom prst="roundRect">
@@ -2589,6 +2421,13 @@
             <a:prstDash val="solid"/>
           </a:ln>
         </p:spPr>
+        <p:txBody>
+          <a:bodyPr/>
+          <a:lstStyle/>
+          <a:p>
+            <a:endParaRPr lang="es-ES"/>
+          </a:p>
+        </p:txBody>
       </p:sp>
       <p:sp>
         <p:nvSpPr>
@@ -2598,7 +2437,7 @@
         </p:nvSpPr>
         <p:spPr>
           <a:xfrm>
-            <a:off x="8961120" y="1828800"/>
+            <a:off x="8961120" y="1188720"/>
             <a:ext cx="1828800" cy="640080"/>
           </a:xfrm>
           <a:prstGeom prst="rect">
@@ -2611,7 +2450,7 @@
           <a:bodyPr wrap="square" rtlCol="0" anchor="ctr"/>
           <a:lstStyle/>
           <a:p>
-            <a:pPr algn="ctr" indent="0" marL="0">
+            <a:pPr marL="0" indent="0" algn="ctr">
               <a:buNone/>
             </a:pPr>
             <a:r>
@@ -2637,7 +2476,7 @@
         </p:nvSpPr>
         <p:spPr>
           <a:xfrm>
-            <a:off x="3200400" y="2148840"/>
+            <a:off x="3200400" y="1508760"/>
             <a:ext cx="5760720" cy="0"/>
           </a:xfrm>
           <a:prstGeom prst="line">
@@ -2652,6 +2491,13 @@
             <a:tailEnd type="triangle"/>
           </a:ln>
         </p:spPr>
+        <p:txBody>
+          <a:bodyPr/>
+          <a:lstStyle/>
+          <a:p>
+            <a:endParaRPr lang="es-ES"/>
+          </a:p>
+        </p:txBody>
       </p:sp>
       <p:sp>
         <p:nvSpPr>
@@ -2661,7 +2507,7 @@
         </p:nvSpPr>
         <p:spPr>
           <a:xfrm>
-            <a:off x="3200400" y="1691640"/>
+            <a:off x="3200400" y="1051560"/>
             <a:ext cx="5760720" cy="320040"/>
           </a:xfrm>
           <a:prstGeom prst="rect">
@@ -2674,7 +2520,7 @@
           <a:bodyPr wrap="square" rtlCol="0" anchor="ctr"/>
           <a:lstStyle/>
           <a:p>
-            <a:pPr algn="ctr" indent="0" marL="0">
+            <a:pPr marL="0" indent="0" algn="ctr">
               <a:buNone/>
             </a:pPr>
             <a:r>
@@ -2694,30 +2540,48 @@
       </p:sp>
       <p:graphicFrame>
         <p:nvGraphicFramePr>
-          <p:cNvPr id="5" name="Table 0"/>
+          <p:cNvPr id="10" name="Table 0"/>
           <p:cNvGraphicFramePr>
             <a:graphicFrameLocks noGrp="1"/>
           </p:cNvGraphicFramePr>
           <p:nvPr>
             <p:extLst>
               <p:ext uri="{D42A27DB-BD31-4B8C-83A1-F6EECF244321}">
-                <p14:modId xmlns:p14="http://schemas.microsoft.com/office/powerpoint/2010/main" val="1579011935"/>
+                <p14:modId xmlns:p14="http://schemas.microsoft.com/office/powerpoint/2010/main" val="3864428576"/>
               </p:ext>
             </p:extLst>
           </p:nvPr>
         </p:nvGraphicFramePr>
         <p:xfrm>
-          <a:off x="548640" y="2926080"/>
-          <a:ext cx="11091672" cy="914400"/>
+          <a:off x="548640" y="2162556"/>
+          <a:ext cx="11091673" cy="2926080"/>
         </p:xfrm>
         <a:graphic>
           <a:graphicData uri="http://schemas.openxmlformats.org/drawingml/2006/table">
             <a:tbl>
               <a:tblPr/>
               <a:tblGrid>
-                <a:gridCol w="1996501"/>
-                <a:gridCol w="1774668"/>
-                <a:gridCol w="7320504"/>
+                <a:gridCol w="1996501">
+                  <a:extLst>
+                    <a:ext uri="{9D8B030D-6E8A-4147-A177-3AD203B41FA5}">
+                      <a16:colId xmlns:a16="http://schemas.microsoft.com/office/drawing/2014/main" val="20000"/>
+                    </a:ext>
+                  </a:extLst>
+                </a:gridCol>
+                <a:gridCol w="1774668">
+                  <a:extLst>
+                    <a:ext uri="{9D8B030D-6E8A-4147-A177-3AD203B41FA5}">
+                      <a16:colId xmlns:a16="http://schemas.microsoft.com/office/drawing/2014/main" val="20001"/>
+                    </a:ext>
+                  </a:extLst>
+                </a:gridCol>
+                <a:gridCol w="7320504">
+                  <a:extLst>
+                    <a:ext uri="{9D8B030D-6E8A-4147-A177-3AD203B41FA5}">
+                      <a16:colId xmlns:a16="http://schemas.microsoft.com/office/drawing/2014/main" val="20002"/>
+                    </a:ext>
+                  </a:extLst>
+                </a:gridCol>
               </a:tblGrid>
               <a:tr h="731520">
                 <a:tc>
@@ -2725,7 +2589,7 @@
                     <a:bodyPr/>
                     <a:lstStyle/>
                     <a:p>
-                      <a:pPr algn="ctr" indent="0" marL="0">
+                      <a:pPr marL="0" indent="0" algn="ctr">
                         <a:buNone/>
                       </a:pPr>
                       <a:r>
@@ -2793,7 +2657,7 @@
                     <a:bodyPr/>
                     <a:lstStyle/>
                     <a:p>
-                      <a:pPr algn="ctr" indent="0" marL="0">
+                      <a:pPr marL="0" indent="0" algn="ctr">
                         <a:buNone/>
                       </a:pPr>
                       <a:r>
@@ -2861,7 +2725,7 @@
                     <a:bodyPr/>
                     <a:lstStyle/>
                     <a:p>
-                      <a:pPr algn="ctr" indent="0" marL="0">
+                      <a:pPr marL="0" indent="0" algn="ctr">
                         <a:buNone/>
                       </a:pPr>
                       <a:r>
@@ -2924,6 +2788,11 @@
                     </a:solidFill>
                   </a:tcPr>
                 </a:tc>
+                <a:extLst>
+                  <a:ext uri="{0D108BD9-81ED-4DB2-BD59-A6C34878D82A}">
+                    <a16:rowId xmlns:a16="http://schemas.microsoft.com/office/drawing/2014/main" val="10000"/>
+                  </a:ext>
+                </a:extLst>
               </a:tr>
               <a:tr h="731520">
                 <a:tc>
@@ -2931,7 +2800,7 @@
                     <a:bodyPr/>
                     <a:lstStyle/>
                     <a:p>
-                      <a:pPr algn="l" indent="0" marL="0">
+                      <a:pPr marL="0" indent="0" algn="l">
                         <a:buNone/>
                       </a:pPr>
                       <a:r>
@@ -2999,7 +2868,7 @@
                     <a:bodyPr/>
                     <a:lstStyle/>
                     <a:p>
-                      <a:pPr algn="l" indent="0" marL="0">
+                      <a:pPr marL="0" indent="0" algn="l">
                         <a:buNone/>
                       </a:pPr>
                       <a:r>
@@ -3067,7 +2936,7 @@
                     <a:bodyPr/>
                     <a:lstStyle/>
                     <a:p>
-                      <a:pPr algn="l" indent="0" marL="0">
+                      <a:pPr marL="0" indent="0" algn="l">
                         <a:buNone/>
                       </a:pPr>
                       <a:r>
@@ -3130,6 +2999,11 @@
                     </a:solidFill>
                   </a:tcPr>
                 </a:tc>
+                <a:extLst>
+                  <a:ext uri="{0D108BD9-81ED-4DB2-BD59-A6C34878D82A}">
+                    <a16:rowId xmlns:a16="http://schemas.microsoft.com/office/drawing/2014/main" val="10001"/>
+                  </a:ext>
+                </a:extLst>
               </a:tr>
               <a:tr h="731520">
                 <a:tc>
@@ -3137,7 +3011,7 @@
                     <a:bodyPr/>
                     <a:lstStyle/>
                     <a:p>
-                      <a:pPr algn="l" indent="0" marL="0">
+                      <a:pPr marL="0" indent="0" algn="l">
                         <a:buNone/>
                       </a:pPr>
                       <a:r>
@@ -3205,7 +3079,7 @@
                     <a:bodyPr/>
                     <a:lstStyle/>
                     <a:p>
-                      <a:pPr algn="l" indent="0" marL="0">
+                      <a:pPr marL="0" indent="0" algn="l">
                         <a:buNone/>
                       </a:pPr>
                       <a:r>
@@ -3273,7 +3147,7 @@
                     <a:bodyPr/>
                     <a:lstStyle/>
                     <a:p>
-                      <a:pPr algn="l" indent="0" marL="0">
+                      <a:pPr marL="0" indent="0" algn="l">
                         <a:buNone/>
                       </a:pPr>
                       <a:r>
@@ -3336,6 +3210,11 @@
                     </a:solidFill>
                   </a:tcPr>
                 </a:tc>
+                <a:extLst>
+                  <a:ext uri="{0D108BD9-81ED-4DB2-BD59-A6C34878D82A}">
+                    <a16:rowId xmlns:a16="http://schemas.microsoft.com/office/drawing/2014/main" val="10002"/>
+                  </a:ext>
+                </a:extLst>
               </a:tr>
               <a:tr h="731520">
                 <a:tc>
@@ -3343,7 +3222,7 @@
                     <a:bodyPr/>
                     <a:lstStyle/>
                     <a:p>
-                      <a:pPr algn="l" indent="0" marL="0">
+                      <a:pPr marL="0" indent="0" algn="l">
                         <a:buNone/>
                       </a:pPr>
                       <a:r>
@@ -3411,7 +3290,7 @@
                     <a:bodyPr/>
                     <a:lstStyle/>
                     <a:p>
-                      <a:pPr algn="l" indent="0" marL="0">
+                      <a:pPr marL="0" indent="0" algn="l">
                         <a:buNone/>
                       </a:pPr>
                       <a:r>
@@ -3479,7 +3358,7 @@
                     <a:bodyPr/>
                     <a:lstStyle/>
                     <a:p>
-                      <a:pPr algn="l" indent="0" marL="0">
+                      <a:pPr marL="0" indent="0" algn="l">
                         <a:buNone/>
                       </a:pPr>
                       <a:r>
@@ -3542,6 +3421,11 @@
                     </a:solidFill>
                   </a:tcPr>
                 </a:tc>
+                <a:extLst>
+                  <a:ext uri="{0D108BD9-81ED-4DB2-BD59-A6C34878D82A}">
+                    <a16:rowId xmlns:a16="http://schemas.microsoft.com/office/drawing/2014/main" val="10003"/>
+                  </a:ext>
+                </a:extLst>
               </a:tr>
             </a:tbl>
           </a:graphicData>
@@ -3571,6 +3455,13 @@
             <a:prstDash val="solid"/>
           </a:ln>
         </p:spPr>
+        <p:txBody>
+          <a:bodyPr/>
+          <a:lstStyle/>
+          <a:p>
+            <a:endParaRPr lang="es-ES"/>
+          </a:p>
+        </p:txBody>
       </p:sp>
       <p:sp>
         <p:nvSpPr>
@@ -3593,7 +3484,7 @@
           <a:bodyPr wrap="square" rtlCol="0" anchor="ctr"/>
           <a:lstStyle/>
           <a:p>
-            <a:pPr indent="0" marL="0">
+            <a:pPr marL="0" indent="0">
               <a:buNone/>
             </a:pPr>
             <a:r>
@@ -3632,7 +3523,7 @@
           <a:bodyPr wrap="square" rtlCol="0" anchor="ctr"/>
           <a:lstStyle/>
           <a:p>
-            <a:pPr algn="r" indent="0" marL="0">
+            <a:pPr marL="0" indent="0" algn="r">
               <a:buNone/>
             </a:pPr>
             <a:r>
@@ -3699,6 +3590,13 @@
             <a:prstDash val="solid"/>
           </a:ln>
         </p:spPr>
+        <p:txBody>
+          <a:bodyPr/>
+          <a:lstStyle/>
+          <a:p>
+            <a:endParaRPr lang="es-ES"/>
+          </a:p>
+        </p:txBody>
       </p:sp>
       <p:sp>
         <p:nvSpPr>
@@ -3721,7 +3619,7 @@
           <a:bodyPr wrap="square" rtlCol="0" anchor="ctr"/>
           <a:lstStyle/>
           <a:p>
-            <a:pPr indent="0" marL="0">
+            <a:pPr marL="0" indent="0">
               <a:buNone/>
             </a:pPr>
             <a:r>
@@ -3763,6 +3661,13 @@
             <a:prstDash val="solid"/>
           </a:ln>
         </p:spPr>
+        <p:txBody>
+          <a:bodyPr/>
+          <a:lstStyle/>
+          <a:p>
+            <a:endParaRPr lang="es-ES"/>
+          </a:p>
+        </p:txBody>
       </p:sp>
       <p:sp>
         <p:nvSpPr>
@@ -3787,6 +3692,13 @@
             <a:tailEnd type="triangle"/>
           </a:ln>
         </p:spPr>
+        <p:txBody>
+          <a:bodyPr/>
+          <a:lstStyle/>
+          <a:p>
+            <a:endParaRPr lang="es-ES"/>
+          </a:p>
+        </p:txBody>
       </p:sp>
       <p:sp>
         <p:nvSpPr>
@@ -3812,6 +3724,13 @@
             <a:prstDash val="solid"/>
           </a:ln>
         </p:spPr>
+        <p:txBody>
+          <a:bodyPr/>
+          <a:lstStyle/>
+          <a:p>
+            <a:endParaRPr lang="es-ES"/>
+          </a:p>
+        </p:txBody>
       </p:sp>
       <p:sp>
         <p:nvSpPr>
@@ -3834,7 +3753,7 @@
           <a:bodyPr wrap="square" rtlCol="0" anchor="ctr"/>
           <a:lstStyle/>
           <a:p>
-            <a:pPr algn="ctr" indent="0" marL="0">
+            <a:pPr marL="0" indent="0" algn="ctr">
               <a:buNone/>
             </a:pPr>
             <a:r>
@@ -3875,6 +3794,13 @@
             <a:tailEnd type="triangle"/>
           </a:ln>
         </p:spPr>
+        <p:txBody>
+          <a:bodyPr/>
+          <a:lstStyle/>
+          <a:p>
+            <a:endParaRPr lang="es-ES"/>
+          </a:p>
+        </p:txBody>
       </p:sp>
       <p:sp>
         <p:nvSpPr>
@@ -3897,7 +3823,7 @@
           <a:bodyPr wrap="square" rtlCol="0" anchor="ctr"/>
           <a:lstStyle/>
           <a:p>
-            <a:pPr algn="ctr" indent="0" marL="0">
+            <a:pPr marL="0" indent="0" algn="ctr">
               <a:buNone/>
             </a:pPr>
             <a:r>
@@ -3939,6 +3865,13 @@
             <a:prstDash val="solid"/>
           </a:ln>
         </p:spPr>
+        <p:txBody>
+          <a:bodyPr/>
+          <a:lstStyle/>
+          <a:p>
+            <a:endParaRPr lang="es-ES"/>
+          </a:p>
+        </p:txBody>
       </p:sp>
       <p:sp>
         <p:nvSpPr>
@@ -3961,7 +3894,7 @@
           <a:bodyPr wrap="square" rtlCol="0" anchor="ctr"/>
           <a:lstStyle/>
           <a:p>
-            <a:pPr algn="ctr" indent="0" marL="0">
+            <a:pPr marL="0" indent="0" algn="ctr">
               <a:buNone/>
             </a:pPr>
             <a:r>
@@ -4002,6 +3935,13 @@
             <a:tailEnd type="triangle"/>
           </a:ln>
         </p:spPr>
+        <p:txBody>
+          <a:bodyPr/>
+          <a:lstStyle/>
+          <a:p>
+            <a:endParaRPr lang="es-ES"/>
+          </a:p>
+        </p:txBody>
       </p:sp>
       <p:sp>
         <p:nvSpPr>
@@ -4024,7 +3964,7 @@
           <a:bodyPr wrap="square" rtlCol="0" anchor="ctr"/>
           <a:lstStyle/>
           <a:p>
-            <a:pPr algn="ctr" indent="0" marL="0">
+            <a:pPr marL="0" indent="0" algn="ctr">
               <a:buNone/>
             </a:pPr>
             <a:r>
@@ -4066,6 +4006,13 @@
             <a:prstDash val="solid"/>
           </a:ln>
         </p:spPr>
+        <p:txBody>
+          <a:bodyPr/>
+          <a:lstStyle/>
+          <a:p>
+            <a:endParaRPr lang="es-ES"/>
+          </a:p>
+        </p:txBody>
       </p:sp>
       <p:sp>
         <p:nvSpPr>
@@ -4088,7 +4035,7 @@
           <a:bodyPr wrap="square" rtlCol="0" anchor="ctr"/>
           <a:lstStyle/>
           <a:p>
-            <a:pPr algn="ctr" indent="0" marL="0">
+            <a:pPr marL="0" indent="0" algn="ctr">
               <a:buNone/>
             </a:pPr>
             <a:r>
@@ -4129,6 +4076,13 @@
             <a:tailEnd type="triangle"/>
           </a:ln>
         </p:spPr>
+        <p:txBody>
+          <a:bodyPr/>
+          <a:lstStyle/>
+          <a:p>
+            <a:endParaRPr lang="es-ES"/>
+          </a:p>
+        </p:txBody>
       </p:sp>
       <p:sp>
         <p:nvSpPr>
@@ -4151,7 +4105,7 @@
           <a:bodyPr wrap="square" rtlCol="0" anchor="ctr"/>
           <a:lstStyle/>
           <a:p>
-            <a:pPr algn="ctr" indent="0" marL="0">
+            <a:pPr marL="0" indent="0" algn="ctr">
               <a:buNone/>
             </a:pPr>
             <a:r>
@@ -4193,6 +4147,13 @@
             <a:prstDash val="solid"/>
           </a:ln>
         </p:spPr>
+        <p:txBody>
+          <a:bodyPr/>
+          <a:lstStyle/>
+          <a:p>
+            <a:endParaRPr lang="es-ES"/>
+          </a:p>
+        </p:txBody>
       </p:sp>
       <p:sp>
         <p:nvSpPr>
@@ -4215,7 +4176,7 @@
           <a:bodyPr wrap="square" rtlCol="0" anchor="ctr"/>
           <a:lstStyle/>
           <a:p>
-            <a:pPr algn="ctr" indent="0" marL="0">
+            <a:pPr marL="0" indent="0" algn="ctr">
               <a:buNone/>
             </a:pPr>
             <a:r>
@@ -4256,6 +4217,13 @@
             <a:tailEnd type="triangle"/>
           </a:ln>
         </p:spPr>
+        <p:txBody>
+          <a:bodyPr/>
+          <a:lstStyle/>
+          <a:p>
+            <a:endParaRPr lang="es-ES"/>
+          </a:p>
+        </p:txBody>
       </p:sp>
       <p:sp>
         <p:nvSpPr>
@@ -4281,6 +4249,13 @@
             <a:prstDash val="solid"/>
           </a:ln>
         </p:spPr>
+        <p:txBody>
+          <a:bodyPr/>
+          <a:lstStyle/>
+          <a:p>
+            <a:endParaRPr lang="es-ES"/>
+          </a:p>
+        </p:txBody>
       </p:sp>
       <p:sp>
         <p:nvSpPr>
@@ -4306,6 +4281,13 @@
             <a:prstDash val="solid"/>
           </a:ln>
         </p:spPr>
+        <p:txBody>
+          <a:bodyPr/>
+          <a:lstStyle/>
+          <a:p>
+            <a:endParaRPr lang="es-ES"/>
+          </a:p>
+        </p:txBody>
       </p:sp>
       <p:sp>
         <p:nvSpPr>
@@ -4331,6 +4313,13 @@
             <a:prstDash val="solid"/>
           </a:ln>
         </p:spPr>
+        <p:txBody>
+          <a:bodyPr/>
+          <a:lstStyle/>
+          <a:p>
+            <a:endParaRPr lang="es-ES"/>
+          </a:p>
+        </p:txBody>
       </p:sp>
       <p:sp>
         <p:nvSpPr>
@@ -4353,7 +4342,7 @@
           <a:bodyPr wrap="square" rtlCol="0" anchor="ctr"/>
           <a:lstStyle/>
           <a:p>
-            <a:pPr algn="ctr" indent="0" marL="0">
+            <a:pPr marL="0" indent="0" algn="ctr">
               <a:buNone/>
             </a:pPr>
             <a:r>
@@ -4394,6 +4383,13 @@
             <a:tailEnd type="triangle"/>
           </a:ln>
         </p:spPr>
+        <p:txBody>
+          <a:bodyPr/>
+          <a:lstStyle/>
+          <a:p>
+            <a:endParaRPr lang="es-ES"/>
+          </a:p>
+        </p:txBody>
       </p:sp>
       <p:sp>
         <p:nvSpPr>
@@ -4416,7 +4412,7 @@
           <a:bodyPr wrap="square" rtlCol="0" anchor="ctr"/>
           <a:lstStyle/>
           <a:p>
-            <a:pPr algn="ctr" indent="0" marL="0">
+            <a:pPr marL="0" indent="0" algn="ctr">
               <a:buNone/>
             </a:pPr>
             <a:r>
@@ -4457,6 +4453,13 @@
             <a:tailEnd type="triangle"/>
           </a:ln>
         </p:spPr>
+        <p:txBody>
+          <a:bodyPr/>
+          <a:lstStyle/>
+          <a:p>
+            <a:endParaRPr lang="es-ES"/>
+          </a:p>
+        </p:txBody>
       </p:sp>
       <p:sp>
         <p:nvSpPr>
@@ -4479,7 +4482,7 @@
           <a:bodyPr wrap="square" rtlCol="0" anchor="ctr"/>
           <a:lstStyle/>
           <a:p>
-            <a:pPr algn="ctr" indent="0" marL="0">
+            <a:pPr marL="0" indent="0" algn="ctr">
               <a:buNone/>
             </a:pPr>
             <a:r>
@@ -4520,6 +4523,13 @@
             <a:tailEnd type="triangle"/>
           </a:ln>
         </p:spPr>
+        <p:txBody>
+          <a:bodyPr/>
+          <a:lstStyle/>
+          <a:p>
+            <a:endParaRPr lang="es-ES"/>
+          </a:p>
+        </p:txBody>
       </p:sp>
       <p:sp>
         <p:nvSpPr>
@@ -4545,6 +4555,13 @@
             <a:prstDash val="solid"/>
           </a:ln>
         </p:spPr>
+        <p:txBody>
+          <a:bodyPr/>
+          <a:lstStyle/>
+          <a:p>
+            <a:endParaRPr lang="es-ES"/>
+          </a:p>
+        </p:txBody>
       </p:sp>
       <p:sp>
         <p:nvSpPr>
@@ -4570,6 +4587,13 @@
             <a:prstDash val="solid"/>
           </a:ln>
         </p:spPr>
+        <p:txBody>
+          <a:bodyPr/>
+          <a:lstStyle/>
+          <a:p>
+            <a:endParaRPr lang="es-ES"/>
+          </a:p>
+        </p:txBody>
       </p:sp>
       <p:sp>
         <p:nvSpPr>
@@ -4595,6 +4619,13 @@
             <a:prstDash val="solid"/>
           </a:ln>
         </p:spPr>
+        <p:txBody>
+          <a:bodyPr/>
+          <a:lstStyle/>
+          <a:p>
+            <a:endParaRPr lang="es-ES"/>
+          </a:p>
+        </p:txBody>
       </p:sp>
       <p:sp>
         <p:nvSpPr>
@@ -4617,7 +4648,7 @@
           <a:bodyPr wrap="square" rtlCol="0" anchor="ctr"/>
           <a:lstStyle/>
           <a:p>
-            <a:pPr indent="0" marL="0">
+            <a:pPr marL="0" indent="0">
               <a:buNone/>
             </a:pPr>
             <a:r>
@@ -4656,7 +4687,7 @@
           <a:bodyPr wrap="square" rtlCol="0" anchor="ctr"/>
           <a:lstStyle/>
           <a:p>
-            <a:pPr algn="r" indent="0" marL="0">
+            <a:pPr marL="0" indent="0" algn="r">
               <a:buNone/>
             </a:pPr>
             <a:r>
@@ -4723,6 +4754,13 @@
             <a:prstDash val="solid"/>
           </a:ln>
         </p:spPr>
+        <p:txBody>
+          <a:bodyPr/>
+          <a:lstStyle/>
+          <a:p>
+            <a:endParaRPr lang="es-ES"/>
+          </a:p>
+        </p:txBody>
       </p:sp>
       <p:sp>
         <p:nvSpPr>
@@ -4745,7 +4783,7 @@
           <a:bodyPr wrap="square" rtlCol="0" anchor="ctr"/>
           <a:lstStyle/>
           <a:p>
-            <a:pPr indent="0" marL="0">
+            <a:pPr marL="0" indent="0">
               <a:buNone/>
             </a:pPr>
             <a:r>
@@ -4787,6 +4825,13 @@
             <a:prstDash val="solid"/>
           </a:ln>
         </p:spPr>
+        <p:txBody>
+          <a:bodyPr/>
+          <a:lstStyle/>
+          <a:p>
+            <a:endParaRPr lang="es-ES"/>
+          </a:p>
+        </p:txBody>
       </p:sp>
       <p:sp>
         <p:nvSpPr>
@@ -4811,6 +4856,13 @@
             <a:tailEnd type="triangle"/>
           </a:ln>
         </p:spPr>
+        <p:txBody>
+          <a:bodyPr/>
+          <a:lstStyle/>
+          <a:p>
+            <a:endParaRPr lang="es-ES"/>
+          </a:p>
+        </p:txBody>
       </p:sp>
       <p:sp>
         <p:nvSpPr>
@@ -4836,6 +4888,13 @@
             <a:prstDash val="solid"/>
           </a:ln>
         </p:spPr>
+        <p:txBody>
+          <a:bodyPr/>
+          <a:lstStyle/>
+          <a:p>
+            <a:endParaRPr lang="es-ES"/>
+          </a:p>
+        </p:txBody>
       </p:sp>
       <p:sp>
         <p:nvSpPr>
@@ -4858,7 +4917,7 @@
           <a:bodyPr wrap="square" rtlCol="0" anchor="ctr"/>
           <a:lstStyle/>
           <a:p>
-            <a:pPr algn="ctr" indent="0" marL="0">
+            <a:pPr marL="0" indent="0" algn="ctr">
               <a:buNone/>
             </a:pPr>
             <a:r>
@@ -4899,6 +4958,13 @@
             <a:tailEnd type="triangle"/>
           </a:ln>
         </p:spPr>
+        <p:txBody>
+          <a:bodyPr/>
+          <a:lstStyle/>
+          <a:p>
+            <a:endParaRPr lang="es-ES"/>
+          </a:p>
+        </p:txBody>
       </p:sp>
       <p:sp>
         <p:nvSpPr>
@@ -4921,7 +4987,7 @@
           <a:bodyPr wrap="square" rtlCol="0" anchor="ctr"/>
           <a:lstStyle/>
           <a:p>
-            <a:pPr algn="ctr" indent="0" marL="0">
+            <a:pPr marL="0" indent="0" algn="ctr">
               <a:buNone/>
             </a:pPr>
             <a:r>
@@ -4963,6 +5029,13 @@
             <a:prstDash val="solid"/>
           </a:ln>
         </p:spPr>
+        <p:txBody>
+          <a:bodyPr/>
+          <a:lstStyle/>
+          <a:p>
+            <a:endParaRPr lang="es-ES"/>
+          </a:p>
+        </p:txBody>
       </p:sp>
       <p:sp>
         <p:nvSpPr>
@@ -4985,7 +5058,7 @@
           <a:bodyPr wrap="square" rtlCol="0" anchor="ctr"/>
           <a:lstStyle/>
           <a:p>
-            <a:pPr algn="ctr" indent="0" marL="0">
+            <a:pPr marL="0" indent="0" algn="ctr">
               <a:buNone/>
             </a:pPr>
             <a:r>
@@ -5026,6 +5099,13 @@
             <a:tailEnd type="triangle"/>
           </a:ln>
         </p:spPr>
+        <p:txBody>
+          <a:bodyPr/>
+          <a:lstStyle/>
+          <a:p>
+            <a:endParaRPr lang="es-ES"/>
+          </a:p>
+        </p:txBody>
       </p:sp>
       <p:sp>
         <p:nvSpPr>
@@ -5048,7 +5128,7 @@
           <a:bodyPr wrap="square" rtlCol="0" anchor="ctr"/>
           <a:lstStyle/>
           <a:p>
-            <a:pPr algn="ctr" indent="0" marL="0">
+            <a:pPr marL="0" indent="0" algn="ctr">
               <a:buNone/>
             </a:pPr>
             <a:r>
@@ -5090,6 +5170,13 @@
             <a:prstDash val="solid"/>
           </a:ln>
         </p:spPr>
+        <p:txBody>
+          <a:bodyPr/>
+          <a:lstStyle/>
+          <a:p>
+            <a:endParaRPr lang="es-ES"/>
+          </a:p>
+        </p:txBody>
       </p:sp>
       <p:sp>
         <p:nvSpPr>
@@ -5112,7 +5199,7 @@
           <a:bodyPr wrap="square" rtlCol="0" anchor="ctr"/>
           <a:lstStyle/>
           <a:p>
-            <a:pPr algn="ctr" indent="0" marL="0">
+            <a:pPr marL="0" indent="0" algn="ctr">
               <a:buNone/>
             </a:pPr>
             <a:r>
@@ -5152,6 +5239,13 @@
             <a:prstDash val="solid"/>
           </a:ln>
         </p:spPr>
+        <p:txBody>
+          <a:bodyPr/>
+          <a:lstStyle/>
+          <a:p>
+            <a:endParaRPr lang="es-ES"/>
+          </a:p>
+        </p:txBody>
       </p:sp>
       <p:sp>
         <p:nvSpPr>
@@ -5175,6 +5269,13 @@
             <a:prstDash val="solid"/>
           </a:ln>
         </p:spPr>
+        <p:txBody>
+          <a:bodyPr/>
+          <a:lstStyle/>
+          <a:p>
+            <a:endParaRPr lang="es-ES"/>
+          </a:p>
+        </p:txBody>
       </p:sp>
       <p:sp>
         <p:nvSpPr>
@@ -5199,6 +5300,13 @@
             <a:tailEnd type="triangle"/>
           </a:ln>
         </p:spPr>
+        <p:txBody>
+          <a:bodyPr/>
+          <a:lstStyle/>
+          <a:p>
+            <a:endParaRPr lang="es-ES"/>
+          </a:p>
+        </p:txBody>
       </p:sp>
       <p:sp>
         <p:nvSpPr>
@@ -5221,7 +5329,7 @@
           <a:bodyPr wrap="square" rtlCol="0" anchor="ctr"/>
           <a:lstStyle/>
           <a:p>
-            <a:pPr algn="ctr" indent="0" marL="0">
+            <a:pPr marL="0" indent="0" algn="ctr">
               <a:buNone/>
             </a:pPr>
             <a:r>
@@ -5263,6 +5371,13 @@
             <a:prstDash val="solid"/>
           </a:ln>
         </p:spPr>
+        <p:txBody>
+          <a:bodyPr/>
+          <a:lstStyle/>
+          <a:p>
+            <a:endParaRPr lang="es-ES"/>
+          </a:p>
+        </p:txBody>
       </p:sp>
       <p:sp>
         <p:nvSpPr>
@@ -5285,7 +5400,7 @@
           <a:bodyPr wrap="square" rtlCol="0" anchor="ctr"/>
           <a:lstStyle/>
           <a:p>
-            <a:pPr indent="0" marL="0">
+            <a:pPr marL="0" indent="0">
               <a:buNone/>
             </a:pPr>
             <a:r>
@@ -5324,7 +5439,7 @@
           <a:bodyPr wrap="square" rtlCol="0" anchor="ctr"/>
           <a:lstStyle/>
           <a:p>
-            <a:pPr algn="r" indent="0" marL="0">
+            <a:pPr marL="0" indent="0" algn="r">
               <a:buNone/>
             </a:pPr>
             <a:r>
@@ -5391,6 +5506,13 @@
             <a:prstDash val="solid"/>
           </a:ln>
         </p:spPr>
+        <p:txBody>
+          <a:bodyPr/>
+          <a:lstStyle/>
+          <a:p>
+            <a:endParaRPr lang="es-ES"/>
+          </a:p>
+        </p:txBody>
       </p:sp>
       <p:sp>
         <p:nvSpPr>
@@ -5413,7 +5535,7 @@
           <a:bodyPr wrap="square" rtlCol="0" anchor="ctr"/>
           <a:lstStyle/>
           <a:p>
-            <a:pPr indent="0" marL="0">
+            <a:pPr marL="0" indent="0">
               <a:buNone/>
             </a:pPr>
             <a:r>
@@ -5447,15 +5569,27 @@
         </p:nvGraphicFramePr>
         <p:xfrm>
           <a:off x="548640" y="1280160"/>
-          <a:ext cx="11091672" cy="914400"/>
+          <a:ext cx="11091672" cy="3108960"/>
         </p:xfrm>
         <a:graphic>
           <a:graphicData uri="http://schemas.openxmlformats.org/drawingml/2006/table">
             <a:tbl>
               <a:tblPr/>
               <a:tblGrid>
-                <a:gridCol w="5545836"/>
-                <a:gridCol w="5545836"/>
+                <a:gridCol w="5545836">
+                  <a:extLst>
+                    <a:ext uri="{9D8B030D-6E8A-4147-A177-3AD203B41FA5}">
+                      <a16:colId xmlns:a16="http://schemas.microsoft.com/office/drawing/2014/main" val="20000"/>
+                    </a:ext>
+                  </a:extLst>
+                </a:gridCol>
+                <a:gridCol w="5545836">
+                  <a:extLst>
+                    <a:ext uri="{9D8B030D-6E8A-4147-A177-3AD203B41FA5}">
+                      <a16:colId xmlns:a16="http://schemas.microsoft.com/office/drawing/2014/main" val="20001"/>
+                    </a:ext>
+                  </a:extLst>
+                </a:gridCol>
               </a:tblGrid>
               <a:tr h="777240">
                 <a:tc>
@@ -5463,7 +5597,7 @@
                     <a:bodyPr/>
                     <a:lstStyle/>
                     <a:p>
-                      <a:pPr algn="ctr" indent="0" marL="0">
+                      <a:pPr marL="0" indent="0" algn="ctr">
                         <a:buNone/>
                       </a:pPr>
                       <a:r>
@@ -5531,7 +5665,7 @@
                     <a:bodyPr/>
                     <a:lstStyle/>
                     <a:p>
-                      <a:pPr algn="ctr" indent="0" marL="0">
+                      <a:pPr marL="0" indent="0" algn="ctr">
                         <a:buNone/>
                       </a:pPr>
                       <a:r>
@@ -5594,6 +5728,11 @@
                     </a:solidFill>
                   </a:tcPr>
                 </a:tc>
+                <a:extLst>
+                  <a:ext uri="{0D108BD9-81ED-4DB2-BD59-A6C34878D82A}">
+                    <a16:rowId xmlns:a16="http://schemas.microsoft.com/office/drawing/2014/main" val="10000"/>
+                  </a:ext>
+                </a:extLst>
               </a:tr>
               <a:tr h="777240">
                 <a:tc>
@@ -5601,7 +5740,7 @@
                     <a:bodyPr/>
                     <a:lstStyle/>
                     <a:p>
-                      <a:pPr algn="l" indent="0" marL="0">
+                      <a:pPr marL="0" indent="0" algn="l">
                         <a:buNone/>
                       </a:pPr>
                       <a:r>
@@ -5669,7 +5808,7 @@
                     <a:bodyPr/>
                     <a:lstStyle/>
                     <a:p>
-                      <a:pPr algn="l" indent="0" marL="0">
+                      <a:pPr marL="0" indent="0" algn="l">
                         <a:buNone/>
                       </a:pPr>
                       <a:r>
@@ -5732,6 +5871,11 @@
                     </a:solidFill>
                   </a:tcPr>
                 </a:tc>
+                <a:extLst>
+                  <a:ext uri="{0D108BD9-81ED-4DB2-BD59-A6C34878D82A}">
+                    <a16:rowId xmlns:a16="http://schemas.microsoft.com/office/drawing/2014/main" val="10001"/>
+                  </a:ext>
+                </a:extLst>
               </a:tr>
               <a:tr h="777240">
                 <a:tc>
@@ -5739,7 +5883,7 @@
                     <a:bodyPr/>
                     <a:lstStyle/>
                     <a:p>
-                      <a:pPr algn="l" indent="0" marL="0">
+                      <a:pPr marL="0" indent="0" algn="l">
                         <a:buNone/>
                       </a:pPr>
                       <a:r>
@@ -5807,7 +5951,7 @@
                     <a:bodyPr/>
                     <a:lstStyle/>
                     <a:p>
-                      <a:pPr algn="l" indent="0" marL="0">
+                      <a:pPr marL="0" indent="0" algn="l">
                         <a:buNone/>
                       </a:pPr>
                       <a:r>
@@ -5870,6 +6014,11 @@
                     </a:solidFill>
                   </a:tcPr>
                 </a:tc>
+                <a:extLst>
+                  <a:ext uri="{0D108BD9-81ED-4DB2-BD59-A6C34878D82A}">
+                    <a16:rowId xmlns:a16="http://schemas.microsoft.com/office/drawing/2014/main" val="10002"/>
+                  </a:ext>
+                </a:extLst>
               </a:tr>
               <a:tr h="777240">
                 <a:tc>
@@ -5877,7 +6026,7 @@
                     <a:bodyPr/>
                     <a:lstStyle/>
                     <a:p>
-                      <a:pPr algn="l" indent="0" marL="0">
+                      <a:pPr marL="0" indent="0" algn="l">
                         <a:buNone/>
                       </a:pPr>
                       <a:r>
@@ -5945,7 +6094,7 @@
                     <a:bodyPr/>
                     <a:lstStyle/>
                     <a:p>
-                      <a:pPr algn="l" indent="0" marL="0">
+                      <a:pPr marL="0" indent="0" algn="l">
                         <a:buNone/>
                       </a:pPr>
                       <a:r>
@@ -6008,6 +6157,11 @@
                     </a:solidFill>
                   </a:tcPr>
                 </a:tc>
+                <a:extLst>
+                  <a:ext uri="{0D108BD9-81ED-4DB2-BD59-A6C34878D82A}">
+                    <a16:rowId xmlns:a16="http://schemas.microsoft.com/office/drawing/2014/main" val="10003"/>
+                  </a:ext>
+                </a:extLst>
               </a:tr>
             </a:tbl>
           </a:graphicData>
@@ -6021,7 +6175,7 @@
         </p:nvSpPr>
         <p:spPr>
           <a:xfrm>
-            <a:off x="548640" y="4206240"/>
+            <a:off x="548640" y="4869180"/>
             <a:ext cx="11091672" cy="868680"/>
           </a:xfrm>
           <a:prstGeom prst="roundRect">
@@ -6037,6 +6191,13 @@
             <a:prstDash val="solid"/>
           </a:ln>
         </p:spPr>
+        <p:txBody>
+          <a:bodyPr/>
+          <a:lstStyle/>
+          <a:p>
+            <a:endParaRPr lang="es-ES"/>
+          </a:p>
+        </p:txBody>
       </p:sp>
       <p:sp>
         <p:nvSpPr>
@@ -6046,7 +6207,7 @@
         </p:nvSpPr>
         <p:spPr>
           <a:xfrm>
-            <a:off x="777240" y="4279392"/>
+            <a:off x="702595" y="4942332"/>
             <a:ext cx="10634472" cy="722376"/>
           </a:xfrm>
           <a:prstGeom prst="rect">
@@ -6059,7 +6220,7 @@
           <a:bodyPr wrap="square" rtlCol="0" anchor="ctr"/>
           <a:lstStyle/>
           <a:p>
-            <a:pPr indent="0" marL="0">
+            <a:pPr marL="0" indent="0">
               <a:buNone/>
             </a:pPr>
             <a:r>
@@ -6098,7 +6259,7 @@
           <a:bodyPr wrap="square" rtlCol="0" anchor="ctr"/>
           <a:lstStyle/>
           <a:p>
-            <a:pPr algn="r" indent="0" marL="0">
+            <a:pPr marL="0" indent="0" algn="r">
               <a:buNone/>
             </a:pPr>
             <a:r>
@@ -6165,6 +6326,13 @@
             <a:prstDash val="solid"/>
           </a:ln>
         </p:spPr>
+        <p:txBody>
+          <a:bodyPr/>
+          <a:lstStyle/>
+          <a:p>
+            <a:endParaRPr lang="es-ES"/>
+          </a:p>
+        </p:txBody>
       </p:sp>
       <p:sp>
         <p:nvSpPr>
@@ -6187,7 +6355,7 @@
           <a:bodyPr wrap="square" rtlCol="0" anchor="ctr"/>
           <a:lstStyle/>
           <a:p>
-            <a:pPr indent="0" marL="0">
+            <a:pPr marL="0" indent="0">
               <a:buNone/>
             </a:pPr>
             <a:r>
@@ -6226,7 +6394,7 @@
           <a:bodyPr wrap="square" rtlCol="0" anchor="t"/>
           <a:lstStyle/>
           <a:p>
-            <a:pPr indent="0" marL="0">
+            <a:pPr marL="0" indent="0">
               <a:spcAft>
                 <a:spcPts val="800"/>
               </a:spcAft>
@@ -6246,7 +6414,7 @@
             <a:endParaRPr lang="en-US" sz="1600" dirty="0"/>
           </a:p>
           <a:p>
-            <a:pPr indent="0" marL="0">
+            <a:pPr marL="0" indent="0">
               <a:spcAft>
                 <a:spcPts val="800"/>
               </a:spcAft>
@@ -6266,7 +6434,7 @@
             <a:endParaRPr lang="en-US" sz="1600" dirty="0"/>
           </a:p>
           <a:p>
-            <a:pPr indent="0" marL="0">
+            <a:pPr marL="0" indent="0">
               <a:spcAft>
                 <a:spcPts val="800"/>
               </a:spcAft>
@@ -6286,7 +6454,7 @@
             <a:endParaRPr lang="en-US" sz="1600" dirty="0"/>
           </a:p>
           <a:p>
-            <a:pPr indent="0" marL="0">
+            <a:pPr marL="0" indent="0">
               <a:spcAft>
                 <a:spcPts val="800"/>
               </a:spcAft>
@@ -6331,6 +6499,13 @@
             <a:prstDash val="solid"/>
           </a:ln>
         </p:spPr>
+        <p:txBody>
+          <a:bodyPr/>
+          <a:lstStyle/>
+          <a:p>
+            <a:endParaRPr lang="es-ES"/>
+          </a:p>
+        </p:txBody>
       </p:sp>
       <p:sp>
         <p:nvSpPr>
@@ -6353,7 +6528,7 @@
           <a:bodyPr wrap="square" rtlCol="0" anchor="ctr"/>
           <a:lstStyle/>
           <a:p>
-            <a:pPr indent="0" marL="0">
+            <a:pPr marL="0" indent="0">
               <a:buNone/>
             </a:pPr>
             <a:r>
@@ -6392,7 +6567,7 @@
           <a:bodyPr wrap="square" rtlCol="0" anchor="ctr"/>
           <a:lstStyle/>
           <a:p>
-            <a:pPr algn="r" indent="0" marL="0">
+            <a:pPr marL="0" indent="0" algn="r">
               <a:buNone/>
             </a:pPr>
             <a:r>
@@ -6711,4 +6886,319 @@
     </a:ext>
   </a:extLst>
 </a:theme>
+</file>
+
+<file path=ppt/theme/theme2.xml><?xml version="1.0" encoding="utf-8"?>
+<a:theme xmlns:a="http://schemas.openxmlformats.org/drawingml/2006/main" name="Tema de Office">
+  <a:themeElements>
+    <a:clrScheme name="Office">
+      <a:dk1>
+        <a:sysClr val="windowText" lastClr="000000"/>
+      </a:dk1>
+      <a:lt1>
+        <a:sysClr val="window" lastClr="FFFFFF"/>
+      </a:lt1>
+      <a:dk2>
+        <a:srgbClr val="0E2841"/>
+      </a:dk2>
+      <a:lt2>
+        <a:srgbClr val="E8E8E8"/>
+      </a:lt2>
+      <a:accent1>
+        <a:srgbClr val="156082"/>
+      </a:accent1>
+      <a:accent2>
+        <a:srgbClr val="E97132"/>
+      </a:accent2>
+      <a:accent3>
+        <a:srgbClr val="196B24"/>
+      </a:accent3>
+      <a:accent4>
+        <a:srgbClr val="0F9ED5"/>
+      </a:accent4>
+      <a:accent5>
+        <a:srgbClr val="A02B93"/>
+      </a:accent5>
+      <a:accent6>
+        <a:srgbClr val="4EA72E"/>
+      </a:accent6>
+      <a:hlink>
+        <a:srgbClr val="467886"/>
+      </a:hlink>
+      <a:folHlink>
+        <a:srgbClr val="96607D"/>
+      </a:folHlink>
+    </a:clrScheme>
+    <a:fontScheme name="Office">
+      <a:majorFont>
+        <a:latin typeface="Aptos Display" panose="02110004020202020204"/>
+        <a:ea typeface=""/>
+        <a:cs typeface=""/>
+        <a:font script="Jpan" typeface="游ゴシック Light"/>
+        <a:font script="Hang" typeface="맑은 고딕"/>
+        <a:font script="Hans" typeface="等线 Light"/>
+        <a:font script="Hant" typeface="新細明體"/>
+        <a:font script="Arab" typeface="Times New Roman"/>
+        <a:font script="Hebr" typeface="Times New Roman"/>
+        <a:font script="Thai" typeface="Angsana New"/>
+        <a:font script="Ethi" typeface="Nyala"/>
+        <a:font script="Beng" typeface="Vrinda"/>
+        <a:font script="Gujr" typeface="Shruti"/>
+        <a:font script="Khmr" typeface="MoolBoran"/>
+        <a:font script="Knda" typeface="Tunga"/>
+        <a:font script="Guru" typeface="Raavi"/>
+        <a:font script="Cans" typeface="Euphemia"/>
+        <a:font script="Cher" typeface="Plantagenet Cherokee"/>
+        <a:font script="Yiii" typeface="Microsoft Yi Baiti"/>
+        <a:font script="Tibt" typeface="Microsoft Himalaya"/>
+        <a:font script="Thaa" typeface="MV Boli"/>
+        <a:font script="Deva" typeface="Mangal"/>
+        <a:font script="Telu" typeface="Gautami"/>
+        <a:font script="Taml" typeface="Latha"/>
+        <a:font script="Syrc" typeface="Estrangelo Edessa"/>
+        <a:font script="Orya" typeface="Kalinga"/>
+        <a:font script="Mlym" typeface="Kartika"/>
+        <a:font script="Laoo" typeface="DokChampa"/>
+        <a:font script="Sinh" typeface="Iskoola Pota"/>
+        <a:font script="Mong" typeface="Mongolian Baiti"/>
+        <a:font script="Viet" typeface="Times New Roman"/>
+        <a:font script="Uigh" typeface="Microsoft Uighur"/>
+        <a:font script="Geor" typeface="Sylfaen"/>
+        <a:font script="Armn" typeface="Arial"/>
+        <a:font script="Bugi" typeface="Leelawadee UI"/>
+        <a:font script="Bopo" typeface="Microsoft JhengHei"/>
+        <a:font script="Java" typeface="Javanese Text"/>
+        <a:font script="Lisu" typeface="Segoe UI"/>
+        <a:font script="Mymr" typeface="Myanmar Text"/>
+        <a:font script="Nkoo" typeface="Ebrima"/>
+        <a:font script="Olck" typeface="Nirmala UI"/>
+        <a:font script="Osma" typeface="Ebrima"/>
+        <a:font script="Phag" typeface="Phagspa"/>
+        <a:font script="Syrn" typeface="Estrangelo Edessa"/>
+        <a:font script="Syrj" typeface="Estrangelo Edessa"/>
+        <a:font script="Syre" typeface="Estrangelo Edessa"/>
+        <a:font script="Sora" typeface="Nirmala UI"/>
+        <a:font script="Tale" typeface="Microsoft Tai Le"/>
+        <a:font script="Talu" typeface="Microsoft New Tai Lue"/>
+        <a:font script="Tfng" typeface="Ebrima"/>
+      </a:majorFont>
+      <a:minorFont>
+        <a:latin typeface="Aptos" panose="02110004020202020204"/>
+        <a:ea typeface=""/>
+        <a:cs typeface=""/>
+        <a:font script="Jpan" typeface="游ゴシック"/>
+        <a:font script="Hang" typeface="맑은 고딕"/>
+        <a:font script="Hans" typeface="等线"/>
+        <a:font script="Hant" typeface="新細明體"/>
+        <a:font script="Arab" typeface="Arial"/>
+        <a:font script="Hebr" typeface="Arial"/>
+        <a:font script="Thai" typeface="Cordia New"/>
+        <a:font script="Ethi" typeface="Nyala"/>
+        <a:font script="Beng" typeface="Vrinda"/>
+        <a:font script="Gujr" typeface="Shruti"/>
+        <a:font script="Khmr" typeface="DaunPenh"/>
+        <a:font script="Knda" typeface="Tunga"/>
+        <a:font script="Guru" typeface="Raavi"/>
+        <a:font script="Cans" typeface="Euphemia"/>
+        <a:font script="Cher" typeface="Plantagenet Cherokee"/>
+        <a:font script="Yiii" typeface="Microsoft Yi Baiti"/>
+        <a:font script="Tibt" typeface="Microsoft Himalaya"/>
+        <a:font script="Thaa" typeface="MV Boli"/>
+        <a:font script="Deva" typeface="Mangal"/>
+        <a:font script="Telu" typeface="Gautami"/>
+        <a:font script="Taml" typeface="Latha"/>
+        <a:font script="Syrc" typeface="Estrangelo Edessa"/>
+        <a:font script="Orya" typeface="Kalinga"/>
+        <a:font script="Mlym" typeface="Kartika"/>
+        <a:font script="Laoo" typeface="DokChampa"/>
+        <a:font script="Sinh" typeface="Iskoola Pota"/>
+        <a:font script="Mong" typeface="Mongolian Baiti"/>
+        <a:font script="Viet" typeface="Arial"/>
+        <a:font script="Uigh" typeface="Microsoft Uighur"/>
+        <a:font script="Geor" typeface="Sylfaen"/>
+        <a:font script="Armn" typeface="Arial"/>
+        <a:font script="Bugi" typeface="Leelawadee UI"/>
+        <a:font script="Bopo" typeface="Microsoft JhengHei"/>
+        <a:font script="Java" typeface="Javanese Text"/>
+        <a:font script="Lisu" typeface="Segoe UI"/>
+        <a:font script="Mymr" typeface="Myanmar Text"/>
+        <a:font script="Nkoo" typeface="Ebrima"/>
+        <a:font script="Olck" typeface="Nirmala UI"/>
+        <a:font script="Osma" typeface="Ebrima"/>
+        <a:font script="Phag" typeface="Phagspa"/>
+        <a:font script="Syrn" typeface="Estrangelo Edessa"/>
+        <a:font script="Syrj" typeface="Estrangelo Edessa"/>
+        <a:font script="Syre" typeface="Estrangelo Edessa"/>
+        <a:font script="Sora" typeface="Nirmala UI"/>
+        <a:font script="Tale" typeface="Microsoft Tai Le"/>
+        <a:font script="Talu" typeface="Microsoft New Tai Lue"/>
+        <a:font script="Tfng" typeface="Ebrima"/>
+      </a:minorFont>
+    </a:fontScheme>
+    <a:fmtScheme name="Office">
+      <a:fillStyleLst>
+        <a:solidFill>
+          <a:schemeClr val="phClr"/>
+        </a:solidFill>
+        <a:gradFill rotWithShape="1">
+          <a:gsLst>
+            <a:gs pos="0">
+              <a:schemeClr val="phClr">
+                <a:lumMod val="110000"/>
+                <a:satMod val="105000"/>
+                <a:tint val="67000"/>
+              </a:schemeClr>
+            </a:gs>
+            <a:gs pos="50000">
+              <a:schemeClr val="phClr">
+                <a:lumMod val="105000"/>
+                <a:satMod val="103000"/>
+                <a:tint val="73000"/>
+              </a:schemeClr>
+            </a:gs>
+            <a:gs pos="100000">
+              <a:schemeClr val="phClr">
+                <a:lumMod val="105000"/>
+                <a:satMod val="109000"/>
+                <a:tint val="81000"/>
+              </a:schemeClr>
+            </a:gs>
+          </a:gsLst>
+          <a:lin ang="5400000" scaled="0"/>
+        </a:gradFill>
+        <a:gradFill rotWithShape="1">
+          <a:gsLst>
+            <a:gs pos="0">
+              <a:schemeClr val="phClr">
+                <a:satMod val="103000"/>
+                <a:lumMod val="102000"/>
+                <a:tint val="94000"/>
+              </a:schemeClr>
+            </a:gs>
+            <a:gs pos="50000">
+              <a:schemeClr val="phClr">
+                <a:satMod val="110000"/>
+                <a:lumMod val="100000"/>
+                <a:shade val="100000"/>
+              </a:schemeClr>
+            </a:gs>
+            <a:gs pos="100000">
+              <a:schemeClr val="phClr">
+                <a:lumMod val="99000"/>
+                <a:satMod val="120000"/>
+                <a:shade val="78000"/>
+              </a:schemeClr>
+            </a:gs>
+          </a:gsLst>
+          <a:lin ang="5400000" scaled="0"/>
+        </a:gradFill>
+      </a:fillStyleLst>
+      <a:lnStyleLst>
+        <a:ln w="12700" cap="flat" cmpd="sng" algn="ctr">
+          <a:solidFill>
+            <a:schemeClr val="phClr"/>
+          </a:solidFill>
+          <a:prstDash val="solid"/>
+          <a:miter lim="800000"/>
+        </a:ln>
+        <a:ln w="19050" cap="flat" cmpd="sng" algn="ctr">
+          <a:solidFill>
+            <a:schemeClr val="phClr"/>
+          </a:solidFill>
+          <a:prstDash val="solid"/>
+          <a:miter lim="800000"/>
+        </a:ln>
+        <a:ln w="25400" cap="flat" cmpd="sng" algn="ctr">
+          <a:solidFill>
+            <a:schemeClr val="phClr"/>
+          </a:solidFill>
+          <a:prstDash val="solid"/>
+          <a:miter lim="800000"/>
+        </a:ln>
+      </a:lnStyleLst>
+      <a:effectStyleLst>
+        <a:effectStyle>
+          <a:effectLst/>
+        </a:effectStyle>
+        <a:effectStyle>
+          <a:effectLst/>
+        </a:effectStyle>
+        <a:effectStyle>
+          <a:effectLst>
+            <a:outerShdw blurRad="57150" dist="19050" dir="5400000" algn="ctr" rotWithShape="0">
+              <a:srgbClr val="000000">
+                <a:alpha val="63000"/>
+              </a:srgbClr>
+            </a:outerShdw>
+          </a:effectLst>
+        </a:effectStyle>
+      </a:effectStyleLst>
+      <a:bgFillStyleLst>
+        <a:solidFill>
+          <a:schemeClr val="phClr"/>
+        </a:solidFill>
+        <a:solidFill>
+          <a:schemeClr val="phClr">
+            <a:tint val="95000"/>
+            <a:satMod val="170000"/>
+          </a:schemeClr>
+        </a:solidFill>
+        <a:gradFill rotWithShape="1">
+          <a:gsLst>
+            <a:gs pos="0">
+              <a:schemeClr val="phClr">
+                <a:tint val="93000"/>
+                <a:satMod val="150000"/>
+                <a:shade val="98000"/>
+                <a:lumMod val="102000"/>
+              </a:schemeClr>
+            </a:gs>
+            <a:gs pos="50000">
+              <a:schemeClr val="phClr">
+                <a:tint val="98000"/>
+                <a:satMod val="130000"/>
+                <a:shade val="90000"/>
+                <a:lumMod val="103000"/>
+              </a:schemeClr>
+            </a:gs>
+            <a:gs pos="100000">
+              <a:schemeClr val="phClr">
+                <a:shade val="63000"/>
+                <a:satMod val="120000"/>
+              </a:schemeClr>
+            </a:gs>
+          </a:gsLst>
+          <a:lin ang="5400000" scaled="0"/>
+        </a:gradFill>
+      </a:bgFillStyleLst>
+    </a:fmtScheme>
+  </a:themeElements>
+  <a:objectDefaults>
+    <a:lnDef>
+      <a:spPr/>
+      <a:bodyPr/>
+      <a:lstStyle/>
+      <a:style>
+        <a:lnRef idx="2">
+          <a:schemeClr val="accent1"/>
+        </a:lnRef>
+        <a:fillRef idx="0">
+          <a:schemeClr val="accent1"/>
+        </a:fillRef>
+        <a:effectRef idx="1">
+          <a:schemeClr val="accent1"/>
+        </a:effectRef>
+        <a:fontRef idx="minor">
+          <a:schemeClr val="tx1"/>
+        </a:fontRef>
+      </a:style>
+    </a:lnDef>
+  </a:objectDefaults>
+  <a:extraClrSchemeLst/>
+  <a:extLst>
+    <a:ext uri="{05A4C25C-085E-4340-85A3-A5531E510DB2}">
+      <thm15:themeFamily xmlns:thm15="http://schemas.microsoft.com/office/thememl/2012/main" name="Office Theme" id="{2E142A2C-CD16-42D6-873A-C26D2A0506FA}" vid="{1BDDFF52-6CD6-40A5-AB3C-68EB2F1E4D0A}"/>
+    </a:ext>
+  </a:extLst>
+</a:theme>
 </file>